--- a/docs/token-cost-slides.pptx
+++ b/docs/token-cost-slides.pptx
@@ -7,7 +7,6 @@
   <p:sldIdLst>
     <p:sldId id="256" r:id="rId7"/>
     <p:sldId id="257" r:id="rId8"/>
-    <p:sldId id="258" r:id="rId9"/>
   </p:sldIdLst>
   <p:sldSz cx="9144000" cy="6858000" type="screen4x3"/>
   <p:notesSz cx="6858000" cy="9144000"/>
@@ -3116,7 +3115,7 @@
               <a:defRPr sz="2600" b="1"/>
             </a:pPr>
             <a:r>
-              <a:t>SAST Triage — $/M Token Cost Comparison</a:t>
+              <a:t>SAST Triage — Cost Comparison</a:t>
             </a:r>
           </a:p>
           <a:p>
@@ -3128,7 +3127,7 @@
               </a:defRPr>
             </a:pPr>
             <a:r>
-              <a:t>Workload: 7,154 in + 1,041 out tokens/triage · Phase 3C ship · Jun 2026</a:t>
+              <a:t>What it costs to review one security alert with each option</a:t>
             </a:r>
           </a:p>
         </p:txBody>
@@ -3152,26 +3151,21 @@
                 <a:tableStyleId>{5C22544A-7EE6-4342-B048-85BDC9FD1C3A}</a:tableStyleId>
               </a:tblPr>
               <a:tblGrid>
-                <a:gridCol w="1062990"/>
-                <a:gridCol w="1062990"/>
-                <a:gridCol w="1062990"/>
-                <a:gridCol w="1062990"/>
-                <a:gridCol w="1062990"/>
-                <a:gridCol w="1062990"/>
-                <a:gridCol w="1062990"/>
-                <a:gridCol w="1062990"/>
+                <a:gridCol w="2834640"/>
+                <a:gridCol w="2834640"/>
+                <a:gridCol w="2834640"/>
               </a:tblGrid>
-              <a:tr h="331470">
+              <a:tr h="441960">
                 <a:tc>
                   <a:txBody>
                     <a:bodyPr/>
                     <a:lstStyle/>
                     <a:p>
                       <a:pPr>
-                        <a:defRPr b="1" sz="800"/>
+                        <a:defRPr b="1" sz="900"/>
                       </a:pPr>
                       <a:r>
-                        <a:t>Category</a:t>
+                        <a:t>Option</a:t>
                       </a:r>
                     </a:p>
                   </a:txBody>
@@ -3183,10 +3177,10 @@
                     <a:lstStyle/>
                     <a:p>
                       <a:pPr>
-                        <a:defRPr b="1" sz="800"/>
+                        <a:defRPr b="1" sz="900"/>
                       </a:pPr>
                       <a:r>
-                        <a:t>Segment</a:t>
+                        <a:t>$/M tokens</a:t>
                       </a:r>
                     </a:p>
                   </a:txBody>
@@ -3198,147 +3192,27 @@
                     <a:lstStyle/>
                     <a:p>
                       <a:pPr>
-                        <a:defRPr b="1" sz="800"/>
+                        <a:defRPr b="1" sz="900"/>
                       </a:pPr>
                       <a:r>
-                        <a:t>Vendor</a:t>
+                        <a:t>$/alert</a:t>
                       </a:r>
                     </a:p>
                   </a:txBody>
                   <a:tcPr/>
                 </a:tc>
+              </a:tr>
+              <a:tr h="441960">
                 <a:tc>
                   <a:txBody>
                     <a:bodyPr/>
                     <a:lstStyle/>
                     <a:p>
                       <a:pPr>
-                        <a:defRPr b="1" sz="800"/>
+                        <a:defRPr sz="800"/>
                       </a:pPr>
                       <a:r>
-                        <a:t>Model</a:t>
-                      </a:r>
-                    </a:p>
-                  </a:txBody>
-                  <a:tcPr/>
-                </a:tc>
-                <a:tc>
-                  <a:txBody>
-                    <a:bodyPr/>
-                    <a:lstStyle/>
-                    <a:p>
-                      <a:pPr>
-                        <a:defRPr b="1" sz="800"/>
-                      </a:pPr>
-                      <a:r>
-                        <a:t>$/M in</a:t>
-                      </a:r>
-                    </a:p>
-                  </a:txBody>
-                  <a:tcPr/>
-                </a:tc>
-                <a:tc>
-                  <a:txBody>
-                    <a:bodyPr/>
-                    <a:lstStyle/>
-                    <a:p>
-                      <a:pPr>
-                        <a:defRPr b="1" sz="800"/>
-                      </a:pPr>
-                      <a:r>
-                        <a:t>$/M out</a:t>
-                      </a:r>
-                    </a:p>
-                  </a:txBody>
-                  <a:tcPr/>
-                </a:tc>
-                <a:tc>
-                  <a:txBody>
-                    <a:bodyPr/>
-                    <a:lstStyle/>
-                    <a:p>
-                      <a:pPr>
-                        <a:defRPr b="1" sz="800"/>
-                      </a:pPr>
-                      <a:r>
-                        <a:t>$/M blended</a:t>
-                      </a:r>
-                    </a:p>
-                  </a:txBody>
-                  <a:tcPr/>
-                </a:tc>
-                <a:tc>
-                  <a:txBody>
-                    <a:bodyPr/>
-                    <a:lstStyle/>
-                    <a:p>
-                      <a:pPr>
-                        <a:defRPr b="1" sz="800"/>
-                      </a:pPr>
-                      <a:r>
-                        <a:t>$/triage</a:t>
-                      </a:r>
-                    </a:p>
-                  </a:txBody>
-                  <a:tcPr/>
-                </a:tc>
-              </a:tr>
-              <a:tr h="331470">
-                <a:tc>
-                  <a:txBody>
-                    <a:bodyPr/>
-                    <a:lstStyle/>
-                    <a:p>
-                      <a:pPr>
-                        <a:defRPr sz="700"/>
-                      </a:pPr>
-                      <a:r>
-                        <a:t>Managed API</a:t>
-                      </a:r>
-                    </a:p>
-                  </a:txBody>
-                  <a:tcPr/>
-                </a:tc>
-                <a:tc>
-                  <a:txBody>
-                    <a:bodyPr/>
-                    <a:lstStyle/>
-                    <a:p>
-                      <a:pPr>
-                        <a:defRPr sz="700"/>
-                      </a:pPr>
-                      <a:r>
-                        <a:t>Bedrock FM</a:t>
-                      </a:r>
-                    </a:p>
-                  </a:txBody>
-                  <a:tcPr/>
-                </a:tc>
-                <a:tc>
-                  <a:txBody>
-                    <a:bodyPr/>
-                    <a:lstStyle/>
-                    <a:p>
-                      <a:pPr>
-                        <a:defRPr sz="700"/>
-                      </a:pPr>
-                      <a:r>
-                        <a:t>Bedrock</a:t>
-                      </a:r>
-                    </a:p>
-                  </a:txBody>
-                  <a:tcPr/>
-                </a:tc>
-                <a:tc>
-                  <a:txBody>
-                    <a:bodyPr/>
-                    <a:lstStyle/>
-                    <a:p>
-                      <a:pPr>
-                        <a:defRPr sz="700"/>
-                      </a:pPr>
-                      <a:r>
-                        <a:t>Ministral 8B</a:t>
+                        <a:t>Qwen3.5-9B self-host (spot)</a:t>
                       </a:r>
                     </a:p>
                   </a:txBody>
@@ -3350,281 +3224,7 @@
                     <a:lstStyle/>
                     <a:p>
                       <a:pPr algn="r">
-                        <a:defRPr sz="700"/>
-                      </a:pPr>
-                      <a:r>
-                        <a:t>$0.150</a:t>
-                      </a:r>
-                    </a:p>
-                  </a:txBody>
-                  <a:tcPr/>
-                </a:tc>
-                <a:tc>
-                  <a:txBody>
-                    <a:bodyPr/>
-                    <a:lstStyle/>
-                    <a:p>
-                      <a:pPr algn="r">
-                        <a:defRPr sz="700"/>
-                      </a:pPr>
-                      <a:r>
-                        <a:t>$0.150</a:t>
-                      </a:r>
-                    </a:p>
-                  </a:txBody>
-                  <a:tcPr/>
-                </a:tc>
-                <a:tc>
-                  <a:txBody>
-                    <a:bodyPr/>
-                    <a:lstStyle/>
-                    <a:p>
-                      <a:pPr algn="r">
-                        <a:defRPr sz="700"/>
-                      </a:pPr>
-                      <a:r>
-                        <a:t>$0.150</a:t>
-                      </a:r>
-                    </a:p>
-                  </a:txBody>
-                  <a:tcPr/>
-                </a:tc>
-                <a:tc>
-                  <a:txBody>
-                    <a:bodyPr/>
-                    <a:lstStyle/>
-                    <a:p>
-                      <a:pPr algn="r">
-                        <a:defRPr sz="700"/>
-                      </a:pPr>
-                      <a:r>
-                        <a:t>$0.00123</a:t>
-                      </a:r>
-                    </a:p>
-                  </a:txBody>
-                  <a:tcPr/>
-                </a:tc>
-              </a:tr>
-              <a:tr h="331470">
-                <a:tc>
-                  <a:txBody>
-                    <a:bodyPr/>
-                    <a:lstStyle/>
-                    <a:p>
-                      <a:pPr>
-                        <a:defRPr sz="700"/>
-                      </a:pPr>
-                      <a:r>
-                        <a:t>Managed API</a:t>
-                      </a:r>
-                    </a:p>
-                  </a:txBody>
-                  <a:tcPr/>
-                </a:tc>
-                <a:tc>
-                  <a:txBody>
-                    <a:bodyPr/>
-                    <a:lstStyle/>
-                    <a:p>
-                      <a:pPr>
-                        <a:defRPr sz="700"/>
-                      </a:pPr>
-                      <a:r>
-                        <a:t>Bedrock FM</a:t>
-                      </a:r>
-                    </a:p>
-                  </a:txBody>
-                  <a:tcPr/>
-                </a:tc>
-                <a:tc>
-                  <a:txBody>
-                    <a:bodyPr/>
-                    <a:lstStyle/>
-                    <a:p>
-                      <a:pPr>
-                        <a:defRPr sz="700"/>
-                      </a:pPr>
-                      <a:r>
-                        <a:t>Bedrock</a:t>
-                      </a:r>
-                    </a:p>
-                  </a:txBody>
-                  <a:tcPr/>
-                </a:tc>
-                <a:tc>
-                  <a:txBody>
-                    <a:bodyPr/>
-                    <a:lstStyle/>
-                    <a:p>
-                      <a:pPr>
-                        <a:defRPr sz="700"/>
-                      </a:pPr>
-                      <a:r>
-                        <a:t>Qwen3.5-9B* (hypothetical)</a:t>
-                      </a:r>
-                    </a:p>
-                  </a:txBody>
-                  <a:tcPr/>
-                </a:tc>
-                <a:tc>
-                  <a:txBody>
-                    <a:bodyPr/>
-                    <a:lstStyle/>
-                    <a:p>
-                      <a:pPr algn="r">
-                        <a:defRPr sz="700"/>
-                      </a:pPr>
-                      <a:r>
-                        <a:t>$0.180</a:t>
-                      </a:r>
-                    </a:p>
-                  </a:txBody>
-                  <a:tcPr/>
-                </a:tc>
-                <a:tc>
-                  <a:txBody>
-                    <a:bodyPr/>
-                    <a:lstStyle/>
-                    <a:p>
-                      <a:pPr algn="r">
-                        <a:defRPr sz="700"/>
-                      </a:pPr>
-                      <a:r>
-                        <a:t>$0.180</a:t>
-                      </a:r>
-                    </a:p>
-                  </a:txBody>
-                  <a:tcPr/>
-                </a:tc>
-                <a:tc>
-                  <a:txBody>
-                    <a:bodyPr/>
-                    <a:lstStyle/>
-                    <a:p>
-                      <a:pPr algn="r">
-                        <a:defRPr sz="700"/>
-                      </a:pPr>
-                      <a:r>
-                        <a:t>$0.180</a:t>
-                      </a:r>
-                    </a:p>
-                  </a:txBody>
-                  <a:tcPr/>
-                </a:tc>
-                <a:tc>
-                  <a:txBody>
-                    <a:bodyPr/>
-                    <a:lstStyle/>
-                    <a:p>
-                      <a:pPr algn="r">
-                        <a:defRPr sz="700"/>
-                      </a:pPr>
-                      <a:r>
-                        <a:t>$0.00148</a:t>
-                      </a:r>
-                    </a:p>
-                  </a:txBody>
-                  <a:tcPr/>
-                </a:tc>
-              </a:tr>
-              <a:tr h="331470">
-                <a:tc>
-                  <a:txBody>
-                    <a:bodyPr/>
-                    <a:lstStyle/>
-                    <a:p>
-                      <a:pPr>
-                        <a:defRPr sz="700"/>
-                      </a:pPr>
-                      <a:r>
-                        <a:t>Self-host</a:t>
-                      </a:r>
-                    </a:p>
-                  </a:txBody>
-                  <a:tcPr/>
-                </a:tc>
-                <a:tc>
-                  <a:txBody>
-                    <a:bodyPr/>
-                    <a:lstStyle/>
-                    <a:p>
-                      <a:pPr>
-                        <a:defRPr sz="700"/>
-                      </a:pPr>
-                      <a:r>
-                        <a:t>—</a:t>
-                      </a:r>
-                    </a:p>
-                  </a:txBody>
-                  <a:tcPr/>
-                </a:tc>
-                <a:tc>
-                  <a:txBody>
-                    <a:bodyPr/>
-                    <a:lstStyle/>
-                    <a:p>
-                      <a:pPr>
-                        <a:defRPr sz="700"/>
-                      </a:pPr>
-                      <a:r>
-                        <a:t>AWS VPC</a:t>
-                      </a:r>
-                    </a:p>
-                  </a:txBody>
-                  <a:tcPr/>
-                </a:tc>
-                <a:tc>
-                  <a:txBody>
-                    <a:bodyPr/>
-                    <a:lstStyle/>
-                    <a:p>
-                      <a:pPr>
-                        <a:defRPr sz="700"/>
-                      </a:pPr>
-                      <a:r>
-                        <a:t>EC2 g6e spot + vLLM + LoRA</a:t>
-                      </a:r>
-                    </a:p>
-                  </a:txBody>
-                  <a:tcPr/>
-                </a:tc>
-                <a:tc>
-                  <a:txBody>
-                    <a:bodyPr/>
-                    <a:lstStyle/>
-                    <a:p>
-                      <a:pPr algn="r">
-                        <a:defRPr sz="700"/>
-                      </a:pPr>
-                      <a:r>
-                        <a:t>derived*</a:t>
-                      </a:r>
-                    </a:p>
-                  </a:txBody>
-                  <a:tcPr/>
-                </a:tc>
-                <a:tc>
-                  <a:txBody>
-                    <a:bodyPr/>
-                    <a:lstStyle/>
-                    <a:p>
-                      <a:pPr algn="r">
-                        <a:defRPr sz="700"/>
-                      </a:pPr>
-                      <a:r>
-                        <a:t>derived*</a:t>
-                      </a:r>
-                    </a:p>
-                  </a:txBody>
-                  <a:tcPr/>
-                </a:tc>
-                <a:tc>
-                  <a:txBody>
-                    <a:bodyPr/>
-                    <a:lstStyle/>
-                    <a:p>
-                      <a:pPr algn="r">
-                        <a:defRPr sz="700"/>
+                        <a:defRPr sz="800"/>
                       </a:pPr>
                       <a:r>
                         <a:t>$0.195</a:t>
@@ -3639,7 +3239,7 @@
                     <a:lstStyle/>
                     <a:p>
                       <a:pPr algn="r">
-                        <a:defRPr sz="700"/>
+                        <a:defRPr sz="800"/>
                       </a:pPr>
                       <a:r>
                         <a:t>$0.00160</a:t>
@@ -3649,62 +3249,17 @@
                   <a:tcPr/>
                 </a:tc>
               </a:tr>
-              <a:tr h="331470">
+              <a:tr h="441960">
                 <a:tc>
                   <a:txBody>
                     <a:bodyPr/>
                     <a:lstStyle/>
                     <a:p>
                       <a:pPr>
-                        <a:defRPr sz="700"/>
+                        <a:defRPr sz="800"/>
                       </a:pPr>
                       <a:r>
-                        <a:t>Managed API</a:t>
-                      </a:r>
-                    </a:p>
-                  </a:txBody>
-                  <a:tcPr/>
-                </a:tc>
-                <a:tc>
-                  <a:txBody>
-                    <a:bodyPr/>
-                    <a:lstStyle/>
-                    <a:p>
-                      <a:pPr>
-                        <a:defRPr sz="700"/>
-                      </a:pPr>
-                      <a:r>
-                        <a:t>Bedrock FM</a:t>
-                      </a:r>
-                    </a:p>
-                  </a:txBody>
-                  <a:tcPr/>
-                </a:tc>
-                <a:tc>
-                  <a:txBody>
-                    <a:bodyPr/>
-                    <a:lstStyle/>
-                    <a:p>
-                      <a:pPr>
-                        <a:defRPr sz="700"/>
-                      </a:pPr>
-                      <a:r>
-                        <a:t>Bedrock</a:t>
-                      </a:r>
-                    </a:p>
-                  </a:txBody>
-                  <a:tcPr/>
-                </a:tc>
-                <a:tc>
-                  <a:txBody>
-                    <a:bodyPr/>
-                    <a:lstStyle/>
-                    <a:p>
-                      <a:pPr>
-                        <a:defRPr sz="700"/>
-                      </a:pPr>
-                      <a:r>
-                        <a:t>Qwen3 32B</a:t>
+                        <a:t>Qwen3.5-9B self-host (on-demand)</a:t>
                       </a:r>
                     </a:p>
                   </a:txBody>
@@ -3716,159 +3271,7 @@
                     <a:lstStyle/>
                     <a:p>
                       <a:pPr algn="r">
-                        <a:defRPr sz="700"/>
-                      </a:pPr>
-                      <a:r>
-                        <a:t>$0.154</a:t>
-                      </a:r>
-                    </a:p>
-                  </a:txBody>
-                  <a:tcPr/>
-                </a:tc>
-                <a:tc>
-                  <a:txBody>
-                    <a:bodyPr/>
-                    <a:lstStyle/>
-                    <a:p>
-                      <a:pPr algn="r">
-                        <a:defRPr sz="700"/>
-                      </a:pPr>
-                      <a:r>
-                        <a:t>$0.618</a:t>
-                      </a:r>
-                    </a:p>
-                  </a:txBody>
-                  <a:tcPr/>
-                </a:tc>
-                <a:tc>
-                  <a:txBody>
-                    <a:bodyPr/>
-                    <a:lstStyle/>
-                    <a:p>
-                      <a:pPr algn="r">
-                        <a:defRPr sz="700"/>
-                      </a:pPr>
-                      <a:r>
-                        <a:t>$0.213</a:t>
-                      </a:r>
-                    </a:p>
-                  </a:txBody>
-                  <a:tcPr/>
-                </a:tc>
-                <a:tc>
-                  <a:txBody>
-                    <a:bodyPr/>
-                    <a:lstStyle/>
-                    <a:p>
-                      <a:pPr algn="r">
-                        <a:defRPr sz="700"/>
-                      </a:pPr>
-                      <a:r>
-                        <a:t>$0.00175</a:t>
-                      </a:r>
-                    </a:p>
-                  </a:txBody>
-                  <a:tcPr/>
-                </a:tc>
-              </a:tr>
-              <a:tr h="331470">
-                <a:tc>
-                  <a:txBody>
-                    <a:bodyPr/>
-                    <a:lstStyle/>
-                    <a:p>
-                      <a:pPr>
-                        <a:defRPr sz="700"/>
-                      </a:pPr>
-                      <a:r>
-                        <a:t>Self-host</a:t>
-                      </a:r>
-                    </a:p>
-                  </a:txBody>
-                  <a:tcPr/>
-                </a:tc>
-                <a:tc>
-                  <a:txBody>
-                    <a:bodyPr/>
-                    <a:lstStyle/>
-                    <a:p>
-                      <a:pPr>
-                        <a:defRPr sz="700"/>
-                      </a:pPr>
-                      <a:r>
-                        <a:t>—</a:t>
-                      </a:r>
-                    </a:p>
-                  </a:txBody>
-                  <a:tcPr/>
-                </a:tc>
-                <a:tc>
-                  <a:txBody>
-                    <a:bodyPr/>
-                    <a:lstStyle/>
-                    <a:p>
-                      <a:pPr>
-                        <a:defRPr sz="700"/>
-                      </a:pPr>
-                      <a:r>
-                        <a:t>AWS VPC</a:t>
-                      </a:r>
-                    </a:p>
-                  </a:txBody>
-                  <a:tcPr/>
-                </a:tc>
-                <a:tc>
-                  <a:txBody>
-                    <a:bodyPr/>
-                    <a:lstStyle/>
-                    <a:p>
-                      <a:pPr>
-                        <a:defRPr sz="700"/>
-                      </a:pPr>
-                      <a:r>
-                        <a:t>EC2 g6e on-demand + vLLM + LoRA</a:t>
-                      </a:r>
-                    </a:p>
-                  </a:txBody>
-                  <a:tcPr/>
-                </a:tc>
-                <a:tc>
-                  <a:txBody>
-                    <a:bodyPr/>
-                    <a:lstStyle/>
-                    <a:p>
-                      <a:pPr algn="r">
-                        <a:defRPr sz="700"/>
-                      </a:pPr>
-                      <a:r>
-                        <a:t>derived*</a:t>
-                      </a:r>
-                    </a:p>
-                  </a:txBody>
-                  <a:tcPr/>
-                </a:tc>
-                <a:tc>
-                  <a:txBody>
-                    <a:bodyPr/>
-                    <a:lstStyle/>
-                    <a:p>
-                      <a:pPr algn="r">
-                        <a:defRPr sz="700"/>
-                      </a:pPr>
-                      <a:r>
-                        <a:t>derived*</a:t>
-                      </a:r>
-                    </a:p>
-                  </a:txBody>
-                  <a:tcPr/>
-                </a:tc>
-                <a:tc>
-                  <a:txBody>
-                    <a:bodyPr/>
-                    <a:lstStyle/>
-                    <a:p>
-                      <a:pPr algn="r">
-                        <a:defRPr sz="700"/>
+                        <a:defRPr sz="800"/>
                       </a:pPr>
                       <a:r>
                         <a:t>$0.852</a:t>
@@ -3883,7 +3286,7 @@
                     <a:lstStyle/>
                     <a:p>
                       <a:pPr algn="r">
-                        <a:defRPr sz="700"/>
+                        <a:defRPr sz="800"/>
                       </a:pPr>
                       <a:r>
                         <a:t>$0.00698</a:t>
@@ -3893,62 +3296,17 @@
                   <a:tcPr/>
                 </a:tc>
               </a:tr>
-              <a:tr h="331470">
+              <a:tr h="441960">
                 <a:tc>
                   <a:txBody>
                     <a:bodyPr/>
                     <a:lstStyle/>
                     <a:p>
                       <a:pPr>
-                        <a:defRPr sz="700"/>
+                        <a:defRPr sz="800"/>
                       </a:pPr>
                       <a:r>
-                        <a:t>Self-host</a:t>
-                      </a:r>
-                    </a:p>
-                  </a:txBody>
-                  <a:tcPr/>
-                </a:tc>
-                <a:tc>
-                  <a:txBody>
-                    <a:bodyPr/>
-                    <a:lstStyle/>
-                    <a:p>
-                      <a:pPr>
-                        <a:defRPr sz="700"/>
-                      </a:pPr>
-                      <a:r>
-                        <a:t>—</a:t>
-                      </a:r>
-                    </a:p>
-                  </a:txBody>
-                  <a:tcPr/>
-                </a:tc>
-                <a:tc>
-                  <a:txBody>
-                    <a:bodyPr/>
-                    <a:lstStyle/>
-                    <a:p>
-                      <a:pPr>
-                        <a:defRPr sz="700"/>
-                      </a:pPr>
-                      <a:r>
-                        <a:t>AWS VPC</a:t>
-                      </a:r>
-                    </a:p>
-                  </a:txBody>
-                  <a:tcPr/>
-                </a:tc>
-                <a:tc>
-                  <a:txBody>
-                    <a:bodyPr/>
-                    <a:lstStyle/>
-                    <a:p>
-                      <a:pPr>
-                        <a:defRPr sz="700"/>
-                      </a:pPr>
-                      <a:r>
-                        <a:t>SageMaker ml.g6e BYOC + LoRA</a:t>
+                        <a:t>Qwen3.5-9B self-host (managed)</a:t>
                       </a:r>
                     </a:p>
                   </a:txBody>
@@ -3960,37 +3318,7 @@
                     <a:lstStyle/>
                     <a:p>
                       <a:pPr algn="r">
-                        <a:defRPr sz="700"/>
-                      </a:pPr>
-                      <a:r>
-                        <a:t>derived*</a:t>
-                      </a:r>
-                    </a:p>
-                  </a:txBody>
-                  <a:tcPr/>
-                </a:tc>
-                <a:tc>
-                  <a:txBody>
-                    <a:bodyPr/>
-                    <a:lstStyle/>
-                    <a:p>
-                      <a:pPr algn="r">
-                        <a:defRPr sz="700"/>
-                      </a:pPr>
-                      <a:r>
-                        <a:t>derived*</a:t>
-                      </a:r>
-                    </a:p>
-                  </a:txBody>
-                  <a:tcPr/>
-                </a:tc>
-                <a:tc>
-                  <a:txBody>
-                    <a:bodyPr/>
-                    <a:lstStyle/>
-                    <a:p>
-                      <a:pPr algn="r">
-                        <a:defRPr sz="700"/>
+                        <a:defRPr sz="800"/>
                       </a:pPr>
                       <a:r>
                         <a:t>$1.19</a:t>
@@ -4005,7 +3333,7 @@
                     <a:lstStyle/>
                     <a:p>
                       <a:pPr algn="r">
-                        <a:defRPr sz="700"/>
+                        <a:defRPr sz="800"/>
                       </a:pPr>
                       <a:r>
                         <a:t>$0.00977</a:t>
@@ -4015,59 +3343,14 @@
                   <a:tcPr/>
                 </a:tc>
               </a:tr>
-              <a:tr h="331470">
+              <a:tr h="441960">
                 <a:tc>
                   <a:txBody>
                     <a:bodyPr/>
                     <a:lstStyle/>
                     <a:p>
                       <a:pPr>
-                        <a:defRPr sz="700"/>
-                      </a:pPr>
-                      <a:r>
-                        <a:t>Managed API</a:t>
-                      </a:r>
-                    </a:p>
-                  </a:txBody>
-                  <a:tcPr/>
-                </a:tc>
-                <a:tc>
-                  <a:txBody>
-                    <a:bodyPr/>
-                    <a:lstStyle/>
-                    <a:p>
-                      <a:pPr>
-                        <a:defRPr sz="700"/>
-                      </a:pPr>
-                      <a:r>
-                        <a:t>Frontier</a:t>
-                      </a:r>
-                    </a:p>
-                  </a:txBody>
-                  <a:tcPr/>
-                </a:tc>
-                <a:tc>
-                  <a:txBody>
-                    <a:bodyPr/>
-                    <a:lstStyle/>
-                    <a:p>
-                      <a:pPr>
-                        <a:defRPr sz="700"/>
-                      </a:pPr>
-                      <a:r>
-                        <a:t>Anthropic</a:t>
-                      </a:r>
-                    </a:p>
-                  </a:txBody>
-                  <a:tcPr/>
-                </a:tc>
-                <a:tc>
-                  <a:txBody>
-                    <a:bodyPr/>
-                    <a:lstStyle/>
-                    <a:p>
-                      <a:pPr>
-                        <a:defRPr sz="700"/>
+                        <a:defRPr sz="800"/>
                       </a:pPr>
                       <a:r>
                         <a:t>Claude Haiku 4.5</a:t>
@@ -4082,37 +3365,7 @@
                     <a:lstStyle/>
                     <a:p>
                       <a:pPr algn="r">
-                        <a:defRPr sz="700"/>
-                      </a:pPr>
-                      <a:r>
-                        <a:t>$1.00</a:t>
-                      </a:r>
-                    </a:p>
-                  </a:txBody>
-                  <a:tcPr/>
-                </a:tc>
-                <a:tc>
-                  <a:txBody>
-                    <a:bodyPr/>
-                    <a:lstStyle/>
-                    <a:p>
-                      <a:pPr algn="r">
-                        <a:defRPr sz="700"/>
-                      </a:pPr>
-                      <a:r>
-                        <a:t>$5.00</a:t>
-                      </a:r>
-                    </a:p>
-                  </a:txBody>
-                  <a:tcPr/>
-                </a:tc>
-                <a:tc>
-                  <a:txBody>
-                    <a:bodyPr/>
-                    <a:lstStyle/>
-                    <a:p>
-                      <a:pPr algn="r">
-                        <a:defRPr sz="700"/>
+                        <a:defRPr sz="800"/>
                       </a:pPr>
                       <a:r>
                         <a:t>$1.51</a:t>
@@ -4127,7 +3380,7 @@
                     <a:lstStyle/>
                     <a:p>
                       <a:pPr algn="r">
-                        <a:defRPr sz="700"/>
+                        <a:defRPr sz="800"/>
                       </a:pPr>
                       <a:r>
                         <a:t>$0.0124</a:t>
@@ -4137,62 +3390,17 @@
                   <a:tcPr/>
                 </a:tc>
               </a:tr>
-              <a:tr h="331470">
+              <a:tr h="441960">
                 <a:tc>
                   <a:txBody>
                     <a:bodyPr/>
                     <a:lstStyle/>
                     <a:p>
                       <a:pPr>
-                        <a:defRPr sz="700"/>
+                        <a:defRPr sz="800"/>
                       </a:pPr>
                       <a:r>
-                        <a:t>Self-host</a:t>
-                      </a:r>
-                    </a:p>
-                  </a:txBody>
-                  <a:tcPr/>
-                </a:tc>
-                <a:tc>
-                  <a:txBody>
-                    <a:bodyPr/>
-                    <a:lstStyle/>
-                    <a:p>
-                      <a:pPr>
-                        <a:defRPr sz="700"/>
-                      </a:pPr>
-                      <a:r>
-                        <a:t>—</a:t>
-                      </a:r>
-                    </a:p>
-                  </a:txBody>
-                  <a:tcPr/>
-                </a:tc>
-                <a:tc>
-                  <a:txBody>
-                    <a:bodyPr/>
-                    <a:lstStyle/>
-                    <a:p>
-                      <a:pPr>
-                        <a:defRPr sz="700"/>
-                      </a:pPr>
-                      <a:r>
-                        <a:t>Bedrock CMI</a:t>
-                      </a:r>
-                    </a:p>
-                  </a:txBody>
-                  <a:tcPr/>
-                </a:tc>
-                <a:tc>
-                  <a:txBody>
-                    <a:bodyPr/>
-                    <a:lstStyle/>
-                    <a:p>
-                      <a:pPr>
-                        <a:defRPr sz="700"/>
-                      </a:pPr>
-                      <a:r>
-                        <a:t>Bedrock Custom Model Import · 1 CMU</a:t>
+                        <a:t>Qwen3.5-9B on Bedrock</a:t>
                       </a:r>
                     </a:p>
                   </a:txBody>
@@ -4204,37 +3412,7 @@
                     <a:lstStyle/>
                     <a:p>
                       <a:pPr algn="r">
-                        <a:defRPr sz="700"/>
-                      </a:pPr>
-                      <a:r>
-                        <a:t>derived*</a:t>
-                      </a:r>
-                    </a:p>
-                  </a:txBody>
-                  <a:tcPr/>
-                </a:tc>
-                <a:tc>
-                  <a:txBody>
-                    <a:bodyPr/>
-                    <a:lstStyle/>
-                    <a:p>
-                      <a:pPr algn="r">
-                        <a:defRPr sz="700"/>
-                      </a:pPr>
-                      <a:r>
-                        <a:t>derived*</a:t>
-                      </a:r>
-                    </a:p>
-                  </a:txBody>
-                  <a:tcPr/>
-                </a:tc>
-                <a:tc>
-                  <a:txBody>
-                    <a:bodyPr/>
-                    <a:lstStyle/>
-                    <a:p>
-                      <a:pPr algn="r">
-                        <a:defRPr sz="700"/>
+                        <a:defRPr sz="800"/>
                       </a:pPr>
                       <a:r>
                         <a:t>$1.73</a:t>
@@ -4249,7 +3427,7 @@
                     <a:lstStyle/>
                     <a:p>
                       <a:pPr algn="r">
-                        <a:defRPr sz="700"/>
+                        <a:defRPr sz="800"/>
                       </a:pPr>
                       <a:r>
                         <a:t>$0.0142</a:t>
@@ -4259,59 +3437,14 @@
                   <a:tcPr/>
                 </a:tc>
               </a:tr>
-              <a:tr h="331470">
+              <a:tr h="441960">
                 <a:tc>
                   <a:txBody>
                     <a:bodyPr/>
                     <a:lstStyle/>
                     <a:p>
                       <a:pPr>
-                        <a:defRPr sz="700"/>
-                      </a:pPr>
-                      <a:r>
-                        <a:t>Managed API</a:t>
-                      </a:r>
-                    </a:p>
-                  </a:txBody>
-                  <a:tcPr/>
-                </a:tc>
-                <a:tc>
-                  <a:txBody>
-                    <a:bodyPr/>
-                    <a:lstStyle/>
-                    <a:p>
-                      <a:pPr>
-                        <a:defRPr sz="700"/>
-                      </a:pPr>
-                      <a:r>
-                        <a:t>Frontier</a:t>
-                      </a:r>
-                    </a:p>
-                  </a:txBody>
-                  <a:tcPr/>
-                </a:tc>
-                <a:tc>
-                  <a:txBody>
-                    <a:bodyPr/>
-                    <a:lstStyle/>
-                    <a:p>
-                      <a:pPr>
-                        <a:defRPr sz="700"/>
-                      </a:pPr>
-                      <a:r>
-                        <a:t>Google</a:t>
-                      </a:r>
-                    </a:p>
-                  </a:txBody>
-                  <a:tcPr/>
-                </a:tc>
-                <a:tc>
-                  <a:txBody>
-                    <a:bodyPr/>
-                    <a:lstStyle/>
-                    <a:p>
-                      <a:pPr>
-                        <a:defRPr sz="700"/>
+                        <a:defRPr sz="800"/>
                       </a:pPr>
                       <a:r>
                         <a:t>Gemini 2.5 Pro</a:t>
@@ -4326,37 +3459,7 @@
                     <a:lstStyle/>
                     <a:p>
                       <a:pPr algn="r">
-                        <a:defRPr sz="700"/>
-                      </a:pPr>
-                      <a:r>
-                        <a:t>$1.25</a:t>
-                      </a:r>
-                    </a:p>
-                  </a:txBody>
-                  <a:tcPr/>
-                </a:tc>
-                <a:tc>
-                  <a:txBody>
-                    <a:bodyPr/>
-                    <a:lstStyle/>
-                    <a:p>
-                      <a:pPr algn="r">
-                        <a:defRPr sz="700"/>
-                      </a:pPr>
-                      <a:r>
-                        <a:t>$10.0</a:t>
-                      </a:r>
-                    </a:p>
-                  </a:txBody>
-                  <a:tcPr/>
-                </a:tc>
-                <a:tc>
-                  <a:txBody>
-                    <a:bodyPr/>
-                    <a:lstStyle/>
-                    <a:p>
-                      <a:pPr algn="r">
-                        <a:defRPr sz="700"/>
+                        <a:defRPr sz="800"/>
                       </a:pPr>
                       <a:r>
                         <a:t>$2.36</a:t>
@@ -4371,7 +3474,7 @@
                     <a:lstStyle/>
                     <a:p>
                       <a:pPr algn="r">
-                        <a:defRPr sz="700"/>
+                        <a:defRPr sz="800"/>
                       </a:pPr>
                       <a:r>
                         <a:t>$0.0194</a:t>
@@ -4381,59 +3484,14 @@
                   <a:tcPr/>
                 </a:tc>
               </a:tr>
-              <a:tr h="331470">
+              <a:tr h="441960">
                 <a:tc>
                   <a:txBody>
                     <a:bodyPr/>
                     <a:lstStyle/>
                     <a:p>
                       <a:pPr>
-                        <a:defRPr sz="700"/>
-                      </a:pPr>
-                      <a:r>
-                        <a:t>Managed API</a:t>
-                      </a:r>
-                    </a:p>
-                  </a:txBody>
-                  <a:tcPr/>
-                </a:tc>
-                <a:tc>
-                  <a:txBody>
-                    <a:bodyPr/>
-                    <a:lstStyle/>
-                    <a:p>
-                      <a:pPr>
-                        <a:defRPr sz="700"/>
-                      </a:pPr>
-                      <a:r>
-                        <a:t>Frontier</a:t>
-                      </a:r>
-                    </a:p>
-                  </a:txBody>
-                  <a:tcPr/>
-                </a:tc>
-                <a:tc>
-                  <a:txBody>
-                    <a:bodyPr/>
-                    <a:lstStyle/>
-                    <a:p>
-                      <a:pPr>
-                        <a:defRPr sz="700"/>
-                      </a:pPr>
-                      <a:r>
-                        <a:t>Google</a:t>
-                      </a:r>
-                    </a:p>
-                  </a:txBody>
-                  <a:tcPr/>
-                </a:tc>
-                <a:tc>
-                  <a:txBody>
-                    <a:bodyPr/>
-                    <a:lstStyle/>
-                    <a:p>
-                      <a:pPr>
-                        <a:defRPr sz="700"/>
+                        <a:defRPr sz="800"/>
                       </a:pPr>
                       <a:r>
                         <a:t>Gemini 3.5 Flash</a:t>
@@ -4448,37 +3506,7 @@
                     <a:lstStyle/>
                     <a:p>
                       <a:pPr algn="r">
-                        <a:defRPr sz="700"/>
-                      </a:pPr>
-                      <a:r>
-                        <a:t>$1.50</a:t>
-                      </a:r>
-                    </a:p>
-                  </a:txBody>
-                  <a:tcPr/>
-                </a:tc>
-                <a:tc>
-                  <a:txBody>
-                    <a:bodyPr/>
-                    <a:lstStyle/>
-                    <a:p>
-                      <a:pPr algn="r">
-                        <a:defRPr sz="700"/>
-                      </a:pPr>
-                      <a:r>
-                        <a:t>$9.00</a:t>
-                      </a:r>
-                    </a:p>
-                  </a:txBody>
-                  <a:tcPr/>
-                </a:tc>
-                <a:tc>
-                  <a:txBody>
-                    <a:bodyPr/>
-                    <a:lstStyle/>
-                    <a:p>
-                      <a:pPr algn="r">
-                        <a:defRPr sz="700"/>
+                        <a:defRPr sz="800"/>
                       </a:pPr>
                       <a:r>
                         <a:t>$2.45</a:t>
@@ -4493,7 +3521,7 @@
                     <a:lstStyle/>
                     <a:p>
                       <a:pPr algn="r">
-                        <a:defRPr sz="700"/>
+                        <a:defRPr sz="800"/>
                       </a:pPr>
                       <a:r>
                         <a:t>$0.0201</a:t>
@@ -4503,62 +3531,17 @@
                   <a:tcPr/>
                 </a:tc>
               </a:tr>
-              <a:tr h="331470">
+              <a:tr h="441960">
                 <a:tc>
                   <a:txBody>
                     <a:bodyPr/>
                     <a:lstStyle/>
                     <a:p>
                       <a:pPr>
-                        <a:defRPr sz="700"/>
+                        <a:defRPr sz="800"/>
                       </a:pPr>
                       <a:r>
-                        <a:t>Managed API</a:t>
-                      </a:r>
-                    </a:p>
-                  </a:txBody>
-                  <a:tcPr/>
-                </a:tc>
-                <a:tc>
-                  <a:txBody>
-                    <a:bodyPr/>
-                    <a:lstStyle/>
-                    <a:p>
-                      <a:pPr>
-                        <a:defRPr sz="700"/>
-                      </a:pPr>
-                      <a:r>
-                        <a:t>Frontier</a:t>
-                      </a:r>
-                    </a:p>
-                  </a:txBody>
-                  <a:tcPr/>
-                </a:tc>
-                <a:tc>
-                  <a:txBody>
-                    <a:bodyPr/>
-                    <a:lstStyle/>
-                    <a:p>
-                      <a:pPr>
-                        <a:defRPr sz="700"/>
-                      </a:pPr>
-                      <a:r>
-                        <a:t>Anthropic</a:t>
-                      </a:r>
-                    </a:p>
-                  </a:txBody>
-                  <a:tcPr/>
-                </a:tc>
-                <a:tc>
-                  <a:txBody>
-                    <a:bodyPr/>
-                    <a:lstStyle/>
-                    <a:p>
-                      <a:pPr>
-                        <a:defRPr sz="700"/>
-                      </a:pPr>
-                      <a:r>
-                        <a:t>Claude Sonnet 5 (intro)</a:t>
+                        <a:t>Claude Sonnet 5</a:t>
                       </a:r>
                     </a:p>
                   </a:txBody>
@@ -4570,37 +3553,7 @@
                     <a:lstStyle/>
                     <a:p>
                       <a:pPr algn="r">
-                        <a:defRPr sz="700"/>
-                      </a:pPr>
-                      <a:r>
-                        <a:t>$2.00</a:t>
-                      </a:r>
-                    </a:p>
-                  </a:txBody>
-                  <a:tcPr/>
-                </a:tc>
-                <a:tc>
-                  <a:txBody>
-                    <a:bodyPr/>
-                    <a:lstStyle/>
-                    <a:p>
-                      <a:pPr algn="r">
-                        <a:defRPr sz="700"/>
-                      </a:pPr>
-                      <a:r>
-                        <a:t>$10.0</a:t>
-                      </a:r>
-                    </a:p>
-                  </a:txBody>
-                  <a:tcPr/>
-                </a:tc>
-                <a:tc>
-                  <a:txBody>
-                    <a:bodyPr/>
-                    <a:lstStyle/>
-                    <a:p>
-                      <a:pPr algn="r">
-                        <a:defRPr sz="700"/>
+                        <a:defRPr sz="800"/>
                       </a:pPr>
                       <a:r>
                         <a:t>$3.02</a:t>
@@ -4615,7 +3568,7 @@
                     <a:lstStyle/>
                     <a:p>
                       <a:pPr algn="r">
-                        <a:defRPr sz="700"/>
+                        <a:defRPr sz="800"/>
                       </a:pPr>
                       <a:r>
                         <a:t>$0.0247</a:t>
@@ -4625,181 +3578,14 @@
                   <a:tcPr/>
                 </a:tc>
               </a:tr>
-              <a:tr h="331470">
+              <a:tr h="441960">
                 <a:tc>
                   <a:txBody>
                     <a:bodyPr/>
                     <a:lstStyle/>
                     <a:p>
                       <a:pPr>
-                        <a:defRPr sz="700"/>
-                      </a:pPr>
-                      <a:r>
-                        <a:t>Self-host</a:t>
-                      </a:r>
-                    </a:p>
-                  </a:txBody>
-                  <a:tcPr/>
-                </a:tc>
-                <a:tc>
-                  <a:txBody>
-                    <a:bodyPr/>
-                    <a:lstStyle/>
-                    <a:p>
-                      <a:pPr>
-                        <a:defRPr sz="700"/>
-                      </a:pPr>
-                      <a:r>
-                        <a:t>—</a:t>
-                      </a:r>
-                    </a:p>
-                  </a:txBody>
-                  <a:tcPr/>
-                </a:tc>
-                <a:tc>
-                  <a:txBody>
-                    <a:bodyPr/>
-                    <a:lstStyle/>
-                    <a:p>
-                      <a:pPr>
-                        <a:defRPr sz="700"/>
-                      </a:pPr>
-                      <a:r>
-                        <a:t>Bedrock CMI</a:t>
-                      </a:r>
-                    </a:p>
-                  </a:txBody>
-                  <a:tcPr/>
-                </a:tc>
-                <a:tc>
-                  <a:txBody>
-                    <a:bodyPr/>
-                    <a:lstStyle/>
-                    <a:p>
-                      <a:pPr>
-                        <a:defRPr sz="700"/>
-                      </a:pPr>
-                      <a:r>
-                        <a:t>Bedrock Custom Model Import · 2 CMU</a:t>
-                      </a:r>
-                    </a:p>
-                  </a:txBody>
-                  <a:tcPr/>
-                </a:tc>
-                <a:tc>
-                  <a:txBody>
-                    <a:bodyPr/>
-                    <a:lstStyle/>
-                    <a:p>
-                      <a:pPr algn="r">
-                        <a:defRPr sz="700"/>
-                      </a:pPr>
-                      <a:r>
-                        <a:t>derived*</a:t>
-                      </a:r>
-                    </a:p>
-                  </a:txBody>
-                  <a:tcPr/>
-                </a:tc>
-                <a:tc>
-                  <a:txBody>
-                    <a:bodyPr/>
-                    <a:lstStyle/>
-                    <a:p>
-                      <a:pPr algn="r">
-                        <a:defRPr sz="700"/>
-                      </a:pPr>
-                      <a:r>
-                        <a:t>derived*</a:t>
-                      </a:r>
-                    </a:p>
-                  </a:txBody>
-                  <a:tcPr/>
-                </a:tc>
-                <a:tc>
-                  <a:txBody>
-                    <a:bodyPr/>
-                    <a:lstStyle/>
-                    <a:p>
-                      <a:pPr algn="r">
-                        <a:defRPr sz="700"/>
-                      </a:pPr>
-                      <a:r>
-                        <a:t>$3.45</a:t>
-                      </a:r>
-                    </a:p>
-                  </a:txBody>
-                  <a:tcPr/>
-                </a:tc>
-                <a:tc>
-                  <a:txBody>
-                    <a:bodyPr/>
-                    <a:lstStyle/>
-                    <a:p>
-                      <a:pPr algn="r">
-                        <a:defRPr sz="700"/>
-                      </a:pPr>
-                      <a:r>
-                        <a:t>$0.0283</a:t>
-                      </a:r>
-                    </a:p>
-                  </a:txBody>
-                  <a:tcPr/>
-                </a:tc>
-              </a:tr>
-              <a:tr h="331470">
-                <a:tc>
-                  <a:txBody>
-                    <a:bodyPr/>
-                    <a:lstStyle/>
-                    <a:p>
-                      <a:pPr>
-                        <a:defRPr sz="700"/>
-                      </a:pPr>
-                      <a:r>
-                        <a:t>Managed API</a:t>
-                      </a:r>
-                    </a:p>
-                  </a:txBody>
-                  <a:tcPr/>
-                </a:tc>
-                <a:tc>
-                  <a:txBody>
-                    <a:bodyPr/>
-                    <a:lstStyle/>
-                    <a:p>
-                      <a:pPr>
-                        <a:defRPr sz="700"/>
-                      </a:pPr>
-                      <a:r>
-                        <a:t>Frontier</a:t>
-                      </a:r>
-                    </a:p>
-                  </a:txBody>
-                  <a:tcPr/>
-                </a:tc>
-                <a:tc>
-                  <a:txBody>
-                    <a:bodyPr/>
-                    <a:lstStyle/>
-                    <a:p>
-                      <a:pPr>
-                        <a:defRPr sz="700"/>
-                      </a:pPr>
-                      <a:r>
-                        <a:t>OpenAI</a:t>
-                      </a:r>
-                    </a:p>
-                  </a:txBody>
-                  <a:tcPr/>
-                </a:tc>
-                <a:tc>
-                  <a:txBody>
-                    <a:bodyPr/>
-                    <a:lstStyle/>
-                    <a:p>
-                      <a:pPr>
-                        <a:defRPr sz="700"/>
+                        <a:defRPr sz="800"/>
                       </a:pPr>
                       <a:r>
                         <a:t>GPT-5.4</a:t>
@@ -4814,37 +3600,7 @@
                     <a:lstStyle/>
                     <a:p>
                       <a:pPr algn="r">
-                        <a:defRPr sz="700"/>
-                      </a:pPr>
-                      <a:r>
-                        <a:t>$2.50</a:t>
-                      </a:r>
-                    </a:p>
-                  </a:txBody>
-                  <a:tcPr/>
-                </a:tc>
-                <a:tc>
-                  <a:txBody>
-                    <a:bodyPr/>
-                    <a:lstStyle/>
-                    <a:p>
-                      <a:pPr algn="r">
-                        <a:defRPr sz="700"/>
-                      </a:pPr>
-                      <a:r>
-                        <a:t>$15.0</a:t>
-                      </a:r>
-                    </a:p>
-                  </a:txBody>
-                  <a:tcPr/>
-                </a:tc>
-                <a:tc>
-                  <a:txBody>
-                    <a:bodyPr/>
-                    <a:lstStyle/>
-                    <a:p>
-                      <a:pPr algn="r">
-                        <a:defRPr sz="700"/>
+                        <a:defRPr sz="800"/>
                       </a:pPr>
                       <a:r>
                         <a:t>$4.09</a:t>
@@ -4859,7 +3615,7 @@
                     <a:lstStyle/>
                     <a:p>
                       <a:pPr algn="r">
-                        <a:defRPr sz="700"/>
+                        <a:defRPr sz="800"/>
                       </a:pPr>
                       <a:r>
                         <a:t>$0.0335</a:t>
@@ -4869,59 +3625,14 @@
                   <a:tcPr/>
                 </a:tc>
               </a:tr>
-              <a:tr h="331470">
+              <a:tr h="441960">
                 <a:tc>
                   <a:txBody>
                     <a:bodyPr/>
                     <a:lstStyle/>
                     <a:p>
                       <a:pPr>
-                        <a:defRPr sz="700"/>
-                      </a:pPr>
-                      <a:r>
-                        <a:t>Managed API</a:t>
-                      </a:r>
-                    </a:p>
-                  </a:txBody>
-                  <a:tcPr/>
-                </a:tc>
-                <a:tc>
-                  <a:txBody>
-                    <a:bodyPr/>
-                    <a:lstStyle/>
-                    <a:p>
-                      <a:pPr>
-                        <a:defRPr sz="700"/>
-                      </a:pPr>
-                      <a:r>
-                        <a:t>Frontier</a:t>
-                      </a:r>
-                    </a:p>
-                  </a:txBody>
-                  <a:tcPr/>
-                </a:tc>
-                <a:tc>
-                  <a:txBody>
-                    <a:bodyPr/>
-                    <a:lstStyle/>
-                    <a:p>
-                      <a:pPr>
-                        <a:defRPr sz="700"/>
-                      </a:pPr>
-                      <a:r>
-                        <a:t>Anthropic</a:t>
-                      </a:r>
-                    </a:p>
-                  </a:txBody>
-                  <a:tcPr/>
-                </a:tc>
-                <a:tc>
-                  <a:txBody>
-                    <a:bodyPr/>
-                    <a:lstStyle/>
-                    <a:p>
-                      <a:pPr>
-                        <a:defRPr sz="700"/>
+                        <a:defRPr sz="800"/>
                       </a:pPr>
                       <a:r>
                         <a:t>Claude Opus 4.8</a:t>
@@ -4936,37 +3647,7 @@
                     <a:lstStyle/>
                     <a:p>
                       <a:pPr algn="r">
-                        <a:defRPr sz="700"/>
-                      </a:pPr>
-                      <a:r>
-                        <a:t>$5.00</a:t>
-                      </a:r>
-                    </a:p>
-                  </a:txBody>
-                  <a:tcPr/>
-                </a:tc>
-                <a:tc>
-                  <a:txBody>
-                    <a:bodyPr/>
-                    <a:lstStyle/>
-                    <a:p>
-                      <a:pPr algn="r">
-                        <a:defRPr sz="700"/>
-                      </a:pPr>
-                      <a:r>
-                        <a:t>$25.0</a:t>
-                      </a:r>
-                    </a:p>
-                  </a:txBody>
-                  <a:tcPr/>
-                </a:tc>
-                <a:tc>
-                  <a:txBody>
-                    <a:bodyPr/>
-                    <a:lstStyle/>
-                    <a:p>
-                      <a:pPr algn="r">
-                        <a:defRPr sz="700"/>
+                        <a:defRPr sz="800"/>
                       </a:pPr>
                       <a:r>
                         <a:t>$7.54</a:t>
@@ -4981,7 +3662,7 @@
                     <a:lstStyle/>
                     <a:p>
                       <a:pPr algn="r">
-                        <a:defRPr sz="700"/>
+                        <a:defRPr sz="800"/>
                       </a:pPr>
                       <a:r>
                         <a:t>$0.0618</a:t>
@@ -4991,59 +3672,14 @@
                   <a:tcPr/>
                 </a:tc>
               </a:tr>
-              <a:tr h="331470">
+              <a:tr h="441960">
                 <a:tc>
                   <a:txBody>
                     <a:bodyPr/>
                     <a:lstStyle/>
                     <a:p>
                       <a:pPr>
-                        <a:defRPr sz="700"/>
-                      </a:pPr>
-                      <a:r>
-                        <a:t>Managed API</a:t>
-                      </a:r>
-                    </a:p>
-                  </a:txBody>
-                  <a:tcPr/>
-                </a:tc>
-                <a:tc>
-                  <a:txBody>
-                    <a:bodyPr/>
-                    <a:lstStyle/>
-                    <a:p>
-                      <a:pPr>
-                        <a:defRPr sz="700"/>
-                      </a:pPr>
-                      <a:r>
-                        <a:t>Frontier</a:t>
-                      </a:r>
-                    </a:p>
-                  </a:txBody>
-                  <a:tcPr/>
-                </a:tc>
-                <a:tc>
-                  <a:txBody>
-                    <a:bodyPr/>
-                    <a:lstStyle/>
-                    <a:p>
-                      <a:pPr>
-                        <a:defRPr sz="700"/>
-                      </a:pPr>
-                      <a:r>
-                        <a:t>OpenAI</a:t>
-                      </a:r>
-                    </a:p>
-                  </a:txBody>
-                  <a:tcPr/>
-                </a:tc>
-                <a:tc>
-                  <a:txBody>
-                    <a:bodyPr/>
-                    <a:lstStyle/>
-                    <a:p>
-                      <a:pPr>
-                        <a:defRPr sz="700"/>
+                        <a:defRPr sz="800"/>
                       </a:pPr>
                       <a:r>
                         <a:t>GPT-5.5</a:t>
@@ -5058,37 +3694,7 @@
                     <a:lstStyle/>
                     <a:p>
                       <a:pPr algn="r">
-                        <a:defRPr sz="700"/>
-                      </a:pPr>
-                      <a:r>
-                        <a:t>$5.00</a:t>
-                      </a:r>
-                    </a:p>
-                  </a:txBody>
-                  <a:tcPr/>
-                </a:tc>
-                <a:tc>
-                  <a:txBody>
-                    <a:bodyPr/>
-                    <a:lstStyle/>
-                    <a:p>
-                      <a:pPr algn="r">
-                        <a:defRPr sz="700"/>
-                      </a:pPr>
-                      <a:r>
-                        <a:t>$30.0</a:t>
-                      </a:r>
-                    </a:p>
-                  </a:txBody>
-                  <a:tcPr/>
-                </a:tc>
-                <a:tc>
-                  <a:txBody>
-                    <a:bodyPr/>
-                    <a:lstStyle/>
-                    <a:p>
-                      <a:pPr algn="r">
-                        <a:defRPr sz="700"/>
+                        <a:defRPr sz="800"/>
                       </a:pPr>
                       <a:r>
                         <a:t>$8.18</a:t>
@@ -5103,7 +3709,7 @@
                     <a:lstStyle/>
                     <a:p>
                       <a:pPr algn="r">
-                        <a:defRPr sz="700"/>
+                        <a:defRPr sz="800"/>
                       </a:pPr>
                       <a:r>
                         <a:t>$0.0670</a:t>
@@ -5161,7 +3767,7 @@
               <a:defRPr sz="2600" b="1"/>
             </a:pPr>
             <a:r>
-              <a:t>Graphic — $/M blended by deployment option</a:t>
+              <a:t>Cost by deployment option</a:t>
             </a:r>
           </a:p>
           <a:p>
@@ -5173,99 +3779,14 @@
               </a:defRPr>
             </a:pPr>
             <a:r>
-              <a:t>Green = Managed API (Bedrock FM + Frontier) · Blue = Self-host BYOM with custom LoRA</a:t>
+              <a:t>$/M tokens — self-host vs pay-per-use vs frontier models</a:t>
             </a:r>
           </a:p>
         </p:txBody>
       </p:sp>
       <p:pic>
         <p:nvPicPr>
-          <p:cNvPr id="3" name="Picture 2" descr="all.png"/>
-          <p:cNvPicPr>
-            <a:picLocks noChangeAspect="1"/>
-          </p:cNvPicPr>
-          <p:nvPr/>
-        </p:nvPicPr>
-        <p:blipFill>
-          <a:blip r:embed="rId2"/>
-          <a:stretch>
-            <a:fillRect/>
-          </a:stretch>
-        </p:blipFill>
-        <p:spPr>
-          <a:xfrm>
-            <a:off x="320040" y="1005840"/>
-            <a:ext cx="8503920" cy="5493429"/>
-          </a:xfrm>
-          <a:prstGeom prst="rect">
-            <a:avLst/>
-          </a:prstGeom>
-        </p:spPr>
-      </p:pic>
-    </p:spTree>
-  </p:cSld>
-  <p:clrMapOvr>
-    <a:masterClrMapping/>
-  </p:clrMapOvr>
-</p:sld>
-</file>
-
-<file path=ppt/slides/slide3.xml><?xml version="1.0" encoding="utf-8"?>
-<p:sld xmlns:a="http://schemas.openxmlformats.org/drawingml/2006/main" xmlns:p="http://schemas.openxmlformats.org/presentationml/2006/main" xmlns:r="http://schemas.openxmlformats.org/officeDocument/2006/relationships">
-  <p:cSld>
-    <p:spTree>
-      <p:nvGrpSpPr>
-        <p:cNvPr id="1" name=""/>
-        <p:cNvGrpSpPr/>
-        <p:nvPr/>
-      </p:nvGrpSpPr>
-      <p:grpSpPr/>
-      <p:sp>
-        <p:nvSpPr>
-          <p:cNvPr id="2" name="TextBox 1"/>
-          <p:cNvSpPr txBox="1"/>
-          <p:nvPr/>
-        </p:nvSpPr>
-        <p:spPr>
-          <a:xfrm>
-            <a:off x="411480" y="228600"/>
-            <a:ext cx="8321040" cy="914400"/>
-          </a:xfrm>
-          <a:prstGeom prst="rect">
-            <a:avLst/>
-          </a:prstGeom>
-          <a:noFill/>
-        </p:spPr>
-        <p:txBody>
-          <a:bodyPr wrap="square">
-            <a:spAutoFit/>
-          </a:bodyPr>
-          <a:lstStyle/>
-          <a:p>
-            <a:pPr>
-              <a:defRPr sz="2600" b="1"/>
-            </a:pPr>
-            <a:r>
-              <a:t>Graphic — Self-host derived rates</a:t>
-            </a:r>
-          </a:p>
-          <a:p>
-            <a:pPr>
-              <a:defRPr sz="1100">
-                <a:solidFill>
-                  <a:srgbClr val="555555"/>
-                </a:solidFill>
-              </a:defRPr>
-            </a:pPr>
-            <a:r>
-              <a:t>* $/M in/out are derived from GPU $/hr or CMU $/min ÷ token throughput — see formula below</a:t>
-            </a:r>
-          </a:p>
-        </p:txBody>
-      </p:sp>
-      <p:pic>
-        <p:nvPicPr>
-          <p:cNvPr id="3" name="Picture 2" descr="selfhost.png"/>
+          <p:cNvPr id="3" name="Picture 2" descr="cost_chart.png"/>
           <p:cNvPicPr>
             <a:picLocks noChangeAspect="1"/>
           </p:cNvPicPr>
@@ -5280,52 +3801,13 @@
         <p:spPr>
           <a:xfrm>
             <a:off x="320040" y="960120"/>
-            <a:ext cx="8229600" cy="3617814"/>
+            <a:ext cx="8503920" cy="5071092"/>
           </a:xfrm>
           <a:prstGeom prst="rect">
             <a:avLst/>
           </a:prstGeom>
         </p:spPr>
       </p:pic>
-      <p:sp>
-        <p:nvSpPr>
-          <p:cNvPr id="4" name="TextBox 3"/>
-          <p:cNvSpPr txBox="1"/>
-          <p:nvPr/>
-        </p:nvSpPr>
-        <p:spPr>
-          <a:xfrm>
-            <a:off x="411480" y="4892040"/>
-            <a:ext cx="8229600" cy="1645920"/>
-          </a:xfrm>
-          <a:prstGeom prst="rect">
-            <a:avLst/>
-          </a:prstGeom>
-          <a:noFill/>
-        </p:spPr>
-        <p:txBody>
-          <a:bodyPr wrap="square">
-            <a:spAutoFit/>
-          </a:bodyPr>
-          <a:lstStyle/>
-          <a:p>
-            <a:pPr>
-              <a:defRPr sz="1000"/>
-            </a:pPr>
-            <a:r>
-              <a:t>VPC: $/triage = (13.5s ÷ 3600) × GPU_$/hr  →  $/M blended = $/triage ÷ (8,195 ÷ 1M)</a:t>
-            </a:r>
-            <a:br/>
-            <a:r>
-              <a:t>Bedrock CMI: $/triage = CMUs × $0.05718/min × 60 × active_hrs  →  same blended formula</a:t>
-            </a:r>
-            <a:br/>
-            <a:r>
-              <a:t>Derived $/M_in = $/triage ÷ (7,154 ÷ 1M)   ·   Derived $/M_out = $/triage ÷ (1,041 ÷ 1M)</a:t>
-            </a:r>
-          </a:p>
-        </p:txBody>
-      </p:sp>
     </p:spTree>
   </p:cSld>
   <p:clrMapOvr>
